--- a/week-2/day-4/Python_AI_Integration_Advanced_Topics.pptx
+++ b/week-2/day-4/Python_AI_Integration_Advanced_Topics.pptx
@@ -7680,7 +7680,16 @@
               <a:defRPr sz="1800" b="1"/>
             </a:pPr>
             <a:r>
-              <a:t>LLM API Architecture: REST/gRPC endpoints, stateless request/response models.</a:t>
+              <a:rPr dirty="0"/>
+              <a:t>LLM API Architecture: REST/</a:t>
+            </a:r>
+            <a:r>
+              <a:rPr dirty="0" err="1"/>
+              <a:t>gRPC</a:t>
+            </a:r>
+            <a:r>
+              <a:rPr dirty="0"/>
+              <a:t> endpoints, stateless request/response models.</a:t>
             </a:r>
           </a:p>
           <a:p>
@@ -7688,7 +7697,16 @@
               <a:defRPr sz="1800" b="1"/>
             </a:pPr>
             <a:r>
-              <a:t>Python SDK Integration: Using official SDKs (OpenAI, Anthropic) and unified routers (LiteLLM).</a:t>
+              <a:rPr dirty="0"/>
+              <a:t>Python SDK Integration: Using official SDKs (OpenAI, Anthropic) and unified routers (</a:t>
+            </a:r>
+            <a:r>
+              <a:rPr dirty="0" err="1"/>
+              <a:t>LiteLLM</a:t>
+            </a:r>
+            <a:r>
+              <a:rPr dirty="0"/>
+              <a:t>).</a:t>
             </a:r>
           </a:p>
           <a:p>
@@ -7696,7 +7714,16 @@
               <a:defRPr sz="1800" b="1"/>
             </a:pPr>
             <a:r>
-              <a:t>Structured Output: Enforcing Pydantic models and JSON modes for reliable data extraction.</a:t>
+              <a:rPr dirty="0"/>
+              <a:t>Structured Output: Enforcing </a:t>
+            </a:r>
+            <a:r>
+              <a:rPr dirty="0" err="1"/>
+              <a:t>Pydantic</a:t>
+            </a:r>
+            <a:r>
+              <a:rPr dirty="0"/>
+              <a:t> models and JSON modes for reliable data extraction.</a:t>
             </a:r>
           </a:p>
           <a:p>
@@ -7704,6 +7731,7 @@
               <a:defRPr sz="1800" b="1"/>
             </a:pPr>
             <a:r>
+              <a:rPr dirty="0"/>
               <a:t>Function/Tool Calling: Defining schemas for LLMs to trigger external Python functions.</a:t>
             </a:r>
           </a:p>
@@ -7712,6 +7740,7 @@
               <a:defRPr sz="1800" b="1"/>
             </a:pPr>
             <a:r>
+              <a:rPr dirty="0"/>
               <a:t>Streaming Responses: Implementing Server-Sent Events (SSE) and async generators for real-time UI updates.</a:t>
             </a:r>
           </a:p>
@@ -7782,6 +7811,7 @@
               <a:defRPr sz="1800" b="1"/>
             </a:pPr>
             <a:r>
+              <a:rPr dirty="0"/>
               <a:t>Token &amp; Context Management: Sliding windows, context compression, and summarization techniques.</a:t>
             </a:r>
           </a:p>
@@ -7790,6 +7820,7 @@
               <a:defRPr sz="1800" b="1"/>
             </a:pPr>
             <a:r>
+              <a:rPr dirty="0"/>
               <a:t>Retry &amp; Timeout Handling: Implementing exponential backoff (Tenacity) for transient API failures.</a:t>
             </a:r>
           </a:p>
@@ -7798,6 +7829,7 @@
               <a:defRPr sz="1800" b="1"/>
             </a:pPr>
             <a:r>
+              <a:rPr dirty="0"/>
               <a:t>Model Selection &amp; Fallbacks: Semantic routing to route simple tasks to small models and complex tasks to frontier models.</a:t>
             </a:r>
           </a:p>
@@ -7806,6 +7838,7 @@
               <a:defRPr sz="1800" b="1"/>
             </a:pPr>
             <a:r>
+              <a:rPr dirty="0"/>
               <a:t>Cost Optimization: Caching identical prompts and batching asynchronous requests.</a:t>
             </a:r>
           </a:p>
@@ -7876,6 +7909,7 @@
               <a:defRPr sz="1800" b="1"/>
             </a:pPr>
             <a:r>
+              <a:rPr dirty="0"/>
               <a:t>AI vs Traditional Automation: Probabilistic (LLM) vs Deterministic (Rules) execution paradigms.</a:t>
             </a:r>
           </a:p>
@@ -7884,6 +7918,7 @@
               <a:defRPr sz="1800" b="1"/>
             </a:pPr>
             <a:r>
+              <a:rPr dirty="0"/>
               <a:t>API → AI → Action Workflow: Ingesting data via API, reasoning via LLM, and executing state changes.</a:t>
             </a:r>
           </a:p>
@@ -7892,6 +7927,7 @@
               <a:defRPr sz="1800" b="1"/>
             </a:pPr>
             <a:r>
+              <a:rPr dirty="0"/>
               <a:t>Event-Driven Automation: Triggering AI workflows via webhooks, Kafka, or message queues.</a:t>
             </a:r>
           </a:p>
@@ -7900,6 +7936,7 @@
               <a:defRPr sz="1800" b="1"/>
             </a:pPr>
             <a:r>
+              <a:rPr dirty="0"/>
               <a:t>Human-in-the-Loop (HITL): Pausing execution for human approval when AI confidence scores fall below thresholds.</a:t>
             </a:r>
           </a:p>
@@ -7970,7 +8007,16 @@
               <a:defRPr sz="1800" b="1"/>
             </a:pPr>
             <a:r>
-              <a:t>Decision-Making with LLMs: Utilizing Chain-of-Thought (CoT) for complex logical routing.</a:t>
+              <a:rPr dirty="0"/>
+              <a:t>Decision-Making with LLMs: Utilizing Chain-of-Thought (</a:t>
+            </a:r>
+            <a:r>
+              <a:rPr dirty="0" err="1"/>
+              <a:t>CoT</a:t>
+            </a:r>
+            <a:r>
+              <a:rPr dirty="0"/>
+              <a:t>) for complex logical routing.</a:t>
             </a:r>
           </a:p>
           <a:p>
@@ -7978,6 +8024,7 @@
               <a:defRPr sz="1800" b="1"/>
             </a:pPr>
             <a:r>
+              <a:rPr dirty="0"/>
               <a:t>Trigger → Process → Validate → Execute Pattern: Ensuring AI outputs are validated against business rules before execution.</a:t>
             </a:r>
           </a:p>
@@ -7986,6 +8033,7 @@
               <a:defRPr sz="1800" b="1"/>
             </a:pPr>
             <a:r>
+              <a:rPr dirty="0"/>
               <a:t>Multi-Step Workflows: Chaining multiple AI and deterministic steps for complex enterprise processes.</a:t>
             </a:r>
           </a:p>
@@ -7994,6 +8042,7 @@
               <a:defRPr sz="1800" b="1"/>
             </a:pPr>
             <a:r>
+              <a:rPr dirty="0"/>
               <a:t>Enterprise Use Cases: Automated invoice processing, IT ticket routing, and dynamic compliance reporting.</a:t>
             </a:r>
           </a:p>
@@ -8040,7 +8089,16 @@
           <a:lstStyle/>
           <a:p>
             <a:r>
-              <a:t>3. RAG-Based AI Applications (Foundations)</a:t>
+              <a:rPr dirty="0"/>
+              <a:t>3. RAG-Based AI </a:t>
+            </a:r>
+            <a:r>
+              <a:rPr sz="3200" dirty="0"/>
+              <a:t>Applications</a:t>
+            </a:r>
+            <a:r>
+              <a:rPr dirty="0"/>
+              <a:t> (Foundations)</a:t>
             </a:r>
           </a:p>
         </p:txBody>
@@ -8064,6 +8122,7 @@
               <a:defRPr sz="1800" b="1"/>
             </a:pPr>
             <a:r>
+              <a:rPr dirty="0"/>
               <a:t>RAG Architecture: Grounding LLM responses in proprietary, real-time enterprise data.</a:t>
             </a:r>
           </a:p>
@@ -8072,6 +8131,7 @@
               <a:defRPr sz="1800" b="1"/>
             </a:pPr>
             <a:r>
+              <a:rPr dirty="0"/>
               <a:t>Document Ingestion Pipeline: Parsing PDFs, HTML, and DBs while preserving layout and tables.</a:t>
             </a:r>
           </a:p>
@@ -8080,6 +8140,7 @@
               <a:defRPr sz="1800" b="1"/>
             </a:pPr>
             <a:r>
+              <a:rPr dirty="0"/>
               <a:t>Chunking Strategies: Recursive character splitting for context preservation; semantic chunking for meaning boundaries.</a:t>
             </a:r>
           </a:p>
@@ -8088,6 +8149,7 @@
               <a:defRPr sz="1800" b="1"/>
             </a:pPr>
             <a:r>
+              <a:rPr dirty="0"/>
               <a:t>Embeddings: Transforming text into high-dimensional vectors (Dense vs. Sparse representations).</a:t>
             </a:r>
           </a:p>
@@ -8096,7 +8158,16 @@
               <a:defRPr sz="1800" b="1"/>
             </a:pPr>
             <a:r>
-              <a:t>Vector Databases: Storing and querying vectors efficiently (Pinecone, Milvus, pgvector).</a:t>
+              <a:rPr dirty="0"/>
+              <a:t>Vector Databases: Storing and querying vectors efficiently (Pinecone, Milvus, </a:t>
+            </a:r>
+            <a:r>
+              <a:rPr dirty="0" err="1"/>
+              <a:t>pgvector</a:t>
+            </a:r>
+            <a:r>
+              <a:rPr dirty="0"/>
+              <a:t>).</a:t>
             </a:r>
           </a:p>
         </p:txBody>
@@ -8268,6 +8339,7 @@
               <a:defRPr sz="1800" b="1"/>
             </a:pPr>
             <a:r>
+              <a:rPr dirty="0"/>
               <a:t>Agent vs Chatbot vs Workflow: Agents possess autonomy, memory, and tool-use; chatbots are conversational; workflows are static.</a:t>
             </a:r>
           </a:p>
@@ -8276,6 +8348,7 @@
               <a:defRPr sz="1800" b="1"/>
             </a:pPr>
             <a:r>
+              <a:rPr dirty="0"/>
               <a:t>Agent Architecture: Perception (inputs), Brain (LLM reasoning), Action (tool execution).</a:t>
             </a:r>
           </a:p>
@@ -8284,6 +8357,7 @@
               <a:defRPr sz="1800" b="1"/>
             </a:pPr>
             <a:r>
+              <a:rPr dirty="0"/>
               <a:t>The Agent Loop: Observe environment → Think (plan) → Act (execute tool) → Observe results.</a:t>
             </a:r>
           </a:p>
@@ -8292,7 +8366,16 @@
               <a:defRPr sz="1800" b="1"/>
             </a:pPr>
             <a:r>
-              <a:t>Planning &amp; Execution: Implementing ReAct (Reason + Act) and Plan-and-Solve frameworks.</a:t>
+              <a:rPr dirty="0"/>
+              <a:t>Planning &amp; Execution: Implementing </a:t>
+            </a:r>
+            <a:r>
+              <a:rPr dirty="0" err="1"/>
+              <a:t>ReAct</a:t>
+            </a:r>
+            <a:r>
+              <a:rPr dirty="0"/>
+              <a:t> (Reason + Act) and Plan-and-Solve frameworks.</a:t>
             </a:r>
           </a:p>
           <a:p>
@@ -8300,6 +8383,7 @@
               <a:defRPr sz="1800" b="1"/>
             </a:pPr>
             <a:r>
+              <a:rPr dirty="0"/>
               <a:t>Tool/Function Calling: Securely mapping LLM intents to authenticated Python API/DB calls.</a:t>
             </a:r>
           </a:p>
@@ -8370,6 +8454,7 @@
               <a:defRPr sz="1800" b="1"/>
             </a:pPr>
             <a:r>
+              <a:rPr dirty="0"/>
               <a:t>Agent Memory: Short-term (context window) vs Long-term (vector DB) memory for persistent state.</a:t>
             </a:r>
           </a:p>
@@ -8378,7 +8463,24 @@
               <a:defRPr sz="1800" b="1"/>
             </a:pPr>
             <a:r>
-              <a:t>Multi-Agent Architecture: Orchestrating specialized agents (e.g., Researcher, Coder, Reviewer) via CrewAI or AutoGen.</a:t>
+              <a:rPr dirty="0"/>
+              <a:t>Multi-Agent Architecture: Orchestrating specialized agents (e.g., Researcher, Coder, Reviewer) via </a:t>
+            </a:r>
+            <a:r>
+              <a:rPr dirty="0" err="1"/>
+              <a:t>CrewAI</a:t>
+            </a:r>
+            <a:r>
+              <a:rPr dirty="0"/>
+              <a:t> or </a:t>
+            </a:r>
+            <a:r>
+              <a:rPr dirty="0" err="1"/>
+              <a:t>AutoGen</a:t>
+            </a:r>
+            <a:r>
+              <a:rPr dirty="0"/>
+              <a:t>.</a:t>
             </a:r>
           </a:p>
           <a:p>
@@ -8386,7 +8488,12 @@
               <a:defRPr sz="1800" b="1"/>
             </a:pPr>
             <a:r>
-              <a:t>LangGraph Concepts: Building stateful, multi-actor applications with cycles and conditional branching.</a:t>
+              <a:rPr dirty="0" err="1"/>
+              <a:t>LangGraph</a:t>
+            </a:r>
+            <a:r>
+              <a:rPr dirty="0"/>
+              <a:t> Concepts: Building stateful, multi-actor applications with cycles and conditional branching.</a:t>
             </a:r>
           </a:p>
           <a:p>
@@ -8394,6 +8501,7 @@
               <a:defRPr sz="1800" b="1"/>
             </a:pPr>
             <a:r>
+              <a:rPr dirty="0"/>
               <a:t>MCP (Model Context Protocol): Standardizing how agents connect to external data sources and tools securely.</a:t>
             </a:r>
           </a:p>
